--- a/lessons/btli101_xrw5fg/btli1_l17_slides.pptx
+++ b/lessons/btli101_xrw5fg/btli1_l17_slides.pptx
@@ -1911,7 +1911,7 @@
           <a:p>
             <a:r>
               <a:rPr lang="en-US" dirty="0"/>
-              <a:t>Ipabilog sa guide ang dalawang qualities sa 2 Timothy 2:2: may katapatan, at may kakayahang magturo sa iba.</a:t>
+              <a:t>Sa guide, ipa-tap para bilugan ang dalawang qualities sa 2 Timothy 2:2: may katapatan, at may kakayahang magturo sa iba (sa printed guide, bilugan ng pen).</a:t>
             </a:r>
           </a:p>
           <a:p>
